--- a/Invited_Speaker_KISA/KISA_invited_speaker_slide_intro.pptx
+++ b/Invited_Speaker_KISA/KISA_invited_speaker_slide_intro.pptx
@@ -259,7 +259,7 @@
           <a:p>
             <a:fld id="{924DF4C5-CB5C-4C73-AA2C-375DD9C59507}" type="datetimeFigureOut">
               <a:rPr lang="eu-ES" smtClean="0"/>
-              <a:t>2026/4/16</a:t>
+              <a:t>2026/4/21</a:t>
             </a:fld>
             <a:endParaRPr lang="eu-ES"/>
           </a:p>
@@ -313,7 +313,7 @@
           <a:p>
             <a:fld id="{13469F2E-5FEA-41B2-8DE1-D0529BB6CAC8}" type="slidenum">
               <a:rPr lang="eu-ES" smtClean="0"/>
-              <a:t>‹zk.›</a:t>
+              <a:t>‹Nº›</a:t>
             </a:fld>
             <a:endParaRPr lang="eu-ES"/>
           </a:p>
@@ -457,7 +457,7 @@
           <a:p>
             <a:fld id="{924DF4C5-CB5C-4C73-AA2C-375DD9C59507}" type="datetimeFigureOut">
               <a:rPr lang="eu-ES" smtClean="0"/>
-              <a:t>2026/4/16</a:t>
+              <a:t>2026/4/21</a:t>
             </a:fld>
             <a:endParaRPr lang="eu-ES"/>
           </a:p>
@@ -511,7 +511,7 @@
           <a:p>
             <a:fld id="{13469F2E-5FEA-41B2-8DE1-D0529BB6CAC8}" type="slidenum">
               <a:rPr lang="eu-ES" smtClean="0"/>
-              <a:t>‹zk.›</a:t>
+              <a:t>‹Nº›</a:t>
             </a:fld>
             <a:endParaRPr lang="eu-ES"/>
           </a:p>
@@ -665,7 +665,7 @@
           <a:p>
             <a:fld id="{924DF4C5-CB5C-4C73-AA2C-375DD9C59507}" type="datetimeFigureOut">
               <a:rPr lang="eu-ES" smtClean="0"/>
-              <a:t>2026/4/16</a:t>
+              <a:t>2026/4/21</a:t>
             </a:fld>
             <a:endParaRPr lang="eu-ES"/>
           </a:p>
@@ -719,7 +719,7 @@
           <a:p>
             <a:fld id="{13469F2E-5FEA-41B2-8DE1-D0529BB6CAC8}" type="slidenum">
               <a:rPr lang="eu-ES" smtClean="0"/>
-              <a:t>‹zk.›</a:t>
+              <a:t>‹Nº›</a:t>
             </a:fld>
             <a:endParaRPr lang="eu-ES"/>
           </a:p>
@@ -863,7 +863,7 @@
           <a:p>
             <a:fld id="{924DF4C5-CB5C-4C73-AA2C-375DD9C59507}" type="datetimeFigureOut">
               <a:rPr lang="eu-ES" smtClean="0"/>
-              <a:t>2026/4/16</a:t>
+              <a:t>2026/4/21</a:t>
             </a:fld>
             <a:endParaRPr lang="eu-ES"/>
           </a:p>
@@ -917,7 +917,7 @@
           <a:p>
             <a:fld id="{13469F2E-5FEA-41B2-8DE1-D0529BB6CAC8}" type="slidenum">
               <a:rPr lang="eu-ES" smtClean="0"/>
-              <a:t>‹zk.›</a:t>
+              <a:t>‹Nº›</a:t>
             </a:fld>
             <a:endParaRPr lang="eu-ES"/>
           </a:p>
@@ -1138,7 +1138,7 @@
           <a:p>
             <a:fld id="{924DF4C5-CB5C-4C73-AA2C-375DD9C59507}" type="datetimeFigureOut">
               <a:rPr lang="eu-ES" smtClean="0"/>
-              <a:t>2026/4/16</a:t>
+              <a:t>2026/4/21</a:t>
             </a:fld>
             <a:endParaRPr lang="eu-ES"/>
           </a:p>
@@ -1192,7 +1192,7 @@
           <a:p>
             <a:fld id="{13469F2E-5FEA-41B2-8DE1-D0529BB6CAC8}" type="slidenum">
               <a:rPr lang="eu-ES" smtClean="0"/>
-              <a:t>‹zk.›</a:t>
+              <a:t>‹Nº›</a:t>
             </a:fld>
             <a:endParaRPr lang="eu-ES"/>
           </a:p>
@@ -1403,7 +1403,7 @@
           <a:p>
             <a:fld id="{924DF4C5-CB5C-4C73-AA2C-375DD9C59507}" type="datetimeFigureOut">
               <a:rPr lang="eu-ES" smtClean="0"/>
-              <a:t>2026/4/16</a:t>
+              <a:t>2026/4/21</a:t>
             </a:fld>
             <a:endParaRPr lang="eu-ES"/>
           </a:p>
@@ -1457,7 +1457,7 @@
           <a:p>
             <a:fld id="{13469F2E-5FEA-41B2-8DE1-D0529BB6CAC8}" type="slidenum">
               <a:rPr lang="eu-ES" smtClean="0"/>
-              <a:t>‹zk.›</a:t>
+              <a:t>‹Nº›</a:t>
             </a:fld>
             <a:endParaRPr lang="eu-ES"/>
           </a:p>
@@ -1815,7 +1815,7 @@
           <a:p>
             <a:fld id="{924DF4C5-CB5C-4C73-AA2C-375DD9C59507}" type="datetimeFigureOut">
               <a:rPr lang="eu-ES" smtClean="0"/>
-              <a:t>2026/4/16</a:t>
+              <a:t>2026/4/21</a:t>
             </a:fld>
             <a:endParaRPr lang="eu-ES"/>
           </a:p>
@@ -1869,7 +1869,7 @@
           <a:p>
             <a:fld id="{13469F2E-5FEA-41B2-8DE1-D0529BB6CAC8}" type="slidenum">
               <a:rPr lang="eu-ES" smtClean="0"/>
-              <a:t>‹zk.›</a:t>
+              <a:t>‹Nº›</a:t>
             </a:fld>
             <a:endParaRPr lang="eu-ES"/>
           </a:p>
@@ -1956,7 +1956,7 @@
           <a:p>
             <a:fld id="{924DF4C5-CB5C-4C73-AA2C-375DD9C59507}" type="datetimeFigureOut">
               <a:rPr lang="eu-ES" smtClean="0"/>
-              <a:t>2026/4/16</a:t>
+              <a:t>2026/4/21</a:t>
             </a:fld>
             <a:endParaRPr lang="eu-ES"/>
           </a:p>
@@ -2010,7 +2010,7 @@
           <a:p>
             <a:fld id="{13469F2E-5FEA-41B2-8DE1-D0529BB6CAC8}" type="slidenum">
               <a:rPr lang="eu-ES" smtClean="0"/>
-              <a:t>‹zk.›</a:t>
+              <a:t>‹Nº›</a:t>
             </a:fld>
             <a:endParaRPr lang="eu-ES"/>
           </a:p>
@@ -2069,7 +2069,7 @@
           <a:p>
             <a:fld id="{924DF4C5-CB5C-4C73-AA2C-375DD9C59507}" type="datetimeFigureOut">
               <a:rPr lang="eu-ES" smtClean="0"/>
-              <a:t>2026/4/16</a:t>
+              <a:t>2026/4/21</a:t>
             </a:fld>
             <a:endParaRPr lang="eu-ES"/>
           </a:p>
@@ -2123,7 +2123,7 @@
           <a:p>
             <a:fld id="{13469F2E-5FEA-41B2-8DE1-D0529BB6CAC8}" type="slidenum">
               <a:rPr lang="eu-ES" smtClean="0"/>
-              <a:t>‹zk.›</a:t>
+              <a:t>‹Nº›</a:t>
             </a:fld>
             <a:endParaRPr lang="eu-ES"/>
           </a:p>
@@ -2380,7 +2380,7 @@
           <a:p>
             <a:fld id="{924DF4C5-CB5C-4C73-AA2C-375DD9C59507}" type="datetimeFigureOut">
               <a:rPr lang="eu-ES" smtClean="0"/>
-              <a:t>2026/4/16</a:t>
+              <a:t>2026/4/21</a:t>
             </a:fld>
             <a:endParaRPr lang="eu-ES"/>
           </a:p>
@@ -2434,7 +2434,7 @@
           <a:p>
             <a:fld id="{13469F2E-5FEA-41B2-8DE1-D0529BB6CAC8}" type="slidenum">
               <a:rPr lang="eu-ES" smtClean="0"/>
-              <a:t>‹zk.›</a:t>
+              <a:t>‹Nº›</a:t>
             </a:fld>
             <a:endParaRPr lang="eu-ES"/>
           </a:p>
@@ -2668,7 +2668,7 @@
           <a:p>
             <a:fld id="{924DF4C5-CB5C-4C73-AA2C-375DD9C59507}" type="datetimeFigureOut">
               <a:rPr lang="eu-ES" smtClean="0"/>
-              <a:t>2026/4/16</a:t>
+              <a:t>2026/4/21</a:t>
             </a:fld>
             <a:endParaRPr lang="eu-ES"/>
           </a:p>
@@ -2722,7 +2722,7 @@
           <a:p>
             <a:fld id="{13469F2E-5FEA-41B2-8DE1-D0529BB6CAC8}" type="slidenum">
               <a:rPr lang="eu-ES" smtClean="0"/>
-              <a:t>‹zk.›</a:t>
+              <a:t>‹Nº›</a:t>
             </a:fld>
             <a:endParaRPr lang="eu-ES"/>
           </a:p>
@@ -2909,7 +2909,7 @@
           <a:p>
             <a:fld id="{924DF4C5-CB5C-4C73-AA2C-375DD9C59507}" type="datetimeFigureOut">
               <a:rPr lang="eu-ES" smtClean="0"/>
-              <a:t>2026/4/16</a:t>
+              <a:t>2026/4/21</a:t>
             </a:fld>
             <a:endParaRPr lang="eu-ES"/>
           </a:p>
@@ -2999,7 +2999,7 @@
           <a:p>
             <a:fld id="{13469F2E-5FEA-41B2-8DE1-D0529BB6CAC8}" type="slidenum">
               <a:rPr lang="eu-ES" smtClean="0"/>
-              <a:t>‹zk.›</a:t>
+              <a:t>‹Nº›</a:t>
             </a:fld>
             <a:endParaRPr lang="eu-ES"/>
           </a:p>
@@ -3372,53 +3372,6 @@
       </p:pic>
       <p:pic>
         <p:nvPicPr>
-          <p:cNvPr id="1028" name="Picture 4">
-            <a:extLst>
-              <a:ext uri="{FF2B5EF4-FFF2-40B4-BE49-F238E27FC236}">
-                <a16:creationId xmlns:a16="http://schemas.microsoft.com/office/drawing/2014/main" id="{7DE25C70-98F6-0B3B-8D80-2DA410AF110E}"/>
-              </a:ext>
-            </a:extLst>
-          </p:cNvPr>
-          <p:cNvPicPr>
-            <a:picLocks noChangeAspect="1" noChangeArrowheads="1"/>
-          </p:cNvPicPr>
-          <p:nvPr/>
-        </p:nvPicPr>
-        <p:blipFill>
-          <a:blip r:embed="rId3">
-            <a:extLst>
-              <a:ext uri="{28A0092B-C50C-407E-A947-70E740481C1C}">
-                <a14:useLocalDpi xmlns:a14="http://schemas.microsoft.com/office/drawing/2010/main" val="0"/>
-              </a:ext>
-            </a:extLst>
-          </a:blip>
-          <a:srcRect/>
-          <a:stretch>
-            <a:fillRect/>
-          </a:stretch>
-        </p:blipFill>
-        <p:spPr bwMode="auto">
-          <a:xfrm>
-            <a:off x="8017730" y="4424155"/>
-            <a:ext cx="3747344" cy="843153"/>
-          </a:xfrm>
-          <a:prstGeom prst="rect">
-            <a:avLst/>
-          </a:prstGeom>
-          <a:noFill/>
-          <a:extLst>
-            <a:ext uri="{909E8E84-426E-40DD-AFC4-6F175D3DCCD1}">
-              <a14:hiddenFill xmlns:a14="http://schemas.microsoft.com/office/drawing/2010/main">
-                <a:solidFill>
-                  <a:srgbClr val="FFFFFF"/>
-                </a:solidFill>
-              </a14:hiddenFill>
-            </a:ext>
-          </a:extLst>
-        </p:spPr>
-      </p:pic>
-      <p:pic>
-        <p:nvPicPr>
           <p:cNvPr id="1030" name="Picture 6">
             <a:extLst>
               <a:ext uri="{FF2B5EF4-FFF2-40B4-BE49-F238E27FC236}">
@@ -3432,7 +3385,7 @@
           <p:nvPr/>
         </p:nvPicPr>
         <p:blipFill rotWithShape="1">
-          <a:blip r:embed="rId4">
+          <a:blip r:embed="rId3">
             <a:alphaModFix amt="60000"/>
             <a:extLst>
               <a:ext uri="{28A0092B-C50C-407E-A947-70E740481C1C}">
@@ -3480,7 +3433,7 @@
           <p:nvPr/>
         </p:nvPicPr>
         <p:blipFill>
-          <a:blip r:embed="rId5"/>
+          <a:blip r:embed="rId4"/>
           <a:stretch>
             <a:fillRect/>
           </a:stretch>
@@ -3510,7 +3463,7 @@
           <p:nvPr/>
         </p:nvPicPr>
         <p:blipFill>
-          <a:blip r:embed="rId6">
+          <a:blip r:embed="rId5">
             <a:extLst>
               <a:ext uri="{28A0092B-C50C-407E-A947-70E740481C1C}">
                 <a14:useLocalDpi xmlns:a14="http://schemas.microsoft.com/office/drawing/2010/main" val="0"/>
@@ -3636,6 +3589,36 @@
           </a:p>
         </p:txBody>
       </p:sp>
+      <p:pic>
+        <p:nvPicPr>
+          <p:cNvPr id="2" name="Imagen 1"/>
+          <p:cNvPicPr>
+            <a:picLocks noChangeAspect="1"/>
+          </p:cNvPicPr>
+          <p:nvPr/>
+        </p:nvPicPr>
+        <p:blipFill>
+          <a:blip r:embed="rId6" cstate="hqprint">
+            <a:extLst>
+              <a:ext uri="{28A0092B-C50C-407E-A947-70E740481C1C}">
+                <a14:useLocalDpi xmlns:a14="http://schemas.microsoft.com/office/drawing/2010/main" val="0"/>
+              </a:ext>
+            </a:extLst>
+          </a:blip>
+          <a:stretch>
+            <a:fillRect/>
+          </a:stretch>
+        </p:blipFill>
+        <p:spPr>
+          <a:xfrm>
+            <a:off x="7683847" y="3973795"/>
+            <a:ext cx="4455459" cy="1552940"/>
+          </a:xfrm>
+          <a:prstGeom prst="rect">
+            <a:avLst/>
+          </a:prstGeom>
+        </p:spPr>
+      </p:pic>
     </p:spTree>
     <p:extLst>
       <p:ext uri="{BB962C8B-B14F-4D97-AF65-F5344CB8AC3E}">
